--- a/materiais/La-Norma-Propuesta-2026.pptx
+++ b/materiais/La-Norma-Propuesta-2026.pptx
@@ -3362,7 +3362,7 @@
         <p:spPr>
           <a:xfrm>
             <a:off x="822960" y="3063240"/>
-            <a:ext cx="3840480" cy="1737360"/>
+            <a:ext cx="3840480" cy="2011680"/>
           </a:xfrm>
           <a:prstGeom prst="rect">
             <a:avLst/>
@@ -3400,7 +3400,7 @@
         </p:nvSpPr>
         <p:spPr>
           <a:xfrm>
-            <a:off x="822960" y="4892040"/>
+            <a:off x="822960" y="5120640"/>
             <a:ext cx="3749039" cy="914400"/>
           </a:xfrm>
           <a:prstGeom prst="rect">
@@ -6105,7 +6105,7 @@
             <a:r>
               <a:rPr sz="1050" b="0" i="0" spc="100">
                 <a:solidFill>
-                  <a:srgbClr val="B8843C"/>
+                  <a:srgbClr val="7C5623"/>
                 </a:solidFill>
                 <a:latin typeface="Courier New"/>
               </a:rPr>
@@ -6262,7 +6262,7 @@
             <a:r>
               <a:rPr sz="1050" b="0" i="0" spc="100">
                 <a:solidFill>
-                  <a:srgbClr val="B8843C"/>
+                  <a:srgbClr val="7C5623"/>
                 </a:solidFill>
                 <a:latin typeface="Courier New"/>
               </a:rPr>
@@ -6419,7 +6419,7 @@
             <a:r>
               <a:rPr sz="1050" b="0" i="0" spc="100">
                 <a:solidFill>
-                  <a:srgbClr val="B8843C"/>
+                  <a:srgbClr val="7C5623"/>
                 </a:solidFill>
                 <a:latin typeface="Courier New"/>
               </a:rPr>
